--- a/Diseniador/GAN-Transferencia-Conocimiento.pptx
+++ b/Diseniador/GAN-Transferencia-Conocimiento.pptx
@@ -209,7 +209,7 @@
           <a:p>
             <a:fld id="{A903F93E-7217-AE40-A4DD-98A7EF3C3F2A}" type="datetimeFigureOut">
               <a:rPr lang="es-EC" smtClean="0"/>
-              <a:t>9/9/2026</a:t>
+              <a:t>10/9/2026</a:t>
             </a:fld>
             <a:endParaRPr lang="es-EC"/>
           </a:p>
@@ -960,7 +960,7 @@
           <a:p>
             <a:fld id="{D36E38E2-8CD1-214B-8036-CC600787765A}" type="datetimeFigureOut">
               <a:rPr lang="es-EC" smtClean="0"/>
-              <a:t>9/9/2026</a:t>
+              <a:t>10/9/2026</a:t>
             </a:fld>
             <a:endParaRPr lang="es-EC"/>
           </a:p>
@@ -1170,7 +1170,7 @@
           <a:p>
             <a:fld id="{D36E38E2-8CD1-214B-8036-CC600787765A}" type="datetimeFigureOut">
               <a:rPr lang="es-EC" smtClean="0"/>
-              <a:t>9/9/2026</a:t>
+              <a:t>10/9/2026</a:t>
             </a:fld>
             <a:endParaRPr lang="es-EC"/>
           </a:p>
@@ -1457,7 +1457,7 @@
           <a:p>
             <a:fld id="{D36E38E2-8CD1-214B-8036-CC600787765A}" type="datetimeFigureOut">
               <a:rPr lang="es-EC" smtClean="0"/>
-              <a:t>9/9/2026</a:t>
+              <a:t>10/9/2026</a:t>
             </a:fld>
             <a:endParaRPr lang="es-EC"/>
           </a:p>
@@ -1880,7 +1880,7 @@
           <a:p>
             <a:fld id="{D36E38E2-8CD1-214B-8036-CC600787765A}" type="datetimeFigureOut">
               <a:rPr lang="es-EC" smtClean="0"/>
-              <a:t>9/9/2026</a:t>
+              <a:t>10/9/2026</a:t>
             </a:fld>
             <a:endParaRPr lang="es-EC"/>
           </a:p>
@@ -2156,7 +2156,7 @@
           <a:p>
             <a:fld id="{D36E38E2-8CD1-214B-8036-CC600787765A}" type="datetimeFigureOut">
               <a:rPr lang="es-EC" smtClean="0"/>
-              <a:t>9/9/2026</a:t>
+              <a:t>10/9/2026</a:t>
             </a:fld>
             <a:endParaRPr lang="es-EC"/>
           </a:p>
@@ -2424,7 +2424,7 @@
           <a:p>
             <a:fld id="{D36E38E2-8CD1-214B-8036-CC600787765A}" type="datetimeFigureOut">
               <a:rPr lang="es-EC" smtClean="0"/>
-              <a:t>9/9/2026</a:t>
+              <a:t>10/9/2026</a:t>
             </a:fld>
             <a:endParaRPr lang="es-EC"/>
           </a:p>
@@ -2839,7 +2839,7 @@
           <a:p>
             <a:fld id="{D36E38E2-8CD1-214B-8036-CC600787765A}" type="datetimeFigureOut">
               <a:rPr lang="es-EC" smtClean="0"/>
-              <a:t>9/9/2026</a:t>
+              <a:t>10/9/2026</a:t>
             </a:fld>
             <a:endParaRPr lang="es-EC"/>
           </a:p>
@@ -3152,7 +3152,7 @@
           <a:p>
             <a:fld id="{D36E38E2-8CD1-214B-8036-CC600787765A}" type="datetimeFigureOut">
               <a:rPr lang="es-EC" smtClean="0"/>
-              <a:t>9/9/2026</a:t>
+              <a:t>10/9/2026</a:t>
             </a:fld>
             <a:endParaRPr lang="es-EC"/>
           </a:p>
@@ -3395,7 +3395,7 @@
           <a:p>
             <a:fld id="{D36E38E2-8CD1-214B-8036-CC600787765A}" type="datetimeFigureOut">
               <a:rPr lang="es-EC" smtClean="0"/>
-              <a:t>9/9/2026</a:t>
+              <a:t>10/9/2026</a:t>
             </a:fld>
             <a:endParaRPr lang="es-EC"/>
           </a:p>
@@ -6132,7 +6132,7 @@
         </p:nvSpPr>
         <p:spPr>
           <a:xfrm>
-            <a:off x="1010399" y="3082669"/>
+            <a:off x="1010399" y="2730930"/>
             <a:ext cx="4909457" cy="646331"/>
           </a:xfrm>
           <a:prstGeom prst="rect">
@@ -6172,8 +6172,8 @@
         </p:nvSpPr>
         <p:spPr>
           <a:xfrm>
-            <a:off x="1010399" y="3803904"/>
-            <a:ext cx="10171200" cy="2487168"/>
+            <a:off x="1010399" y="3630168"/>
+            <a:ext cx="10171200" cy="2542032"/>
           </a:xfrm>
           <a:prstGeom prst="rect">
             <a:avLst/>

--- a/Diseniador/GAN-Transferencia-Conocimiento.pptx
+++ b/Diseniador/GAN-Transferencia-Conocimiento.pptx
@@ -209,7 +209,7 @@
           <a:p>
             <a:fld id="{A903F93E-7217-AE40-A4DD-98A7EF3C3F2A}" type="datetimeFigureOut">
               <a:rPr lang="es-EC" smtClean="0"/>
-              <a:t>10/9/2026</a:t>
+              <a:t>21/9/2026</a:t>
             </a:fld>
             <a:endParaRPr lang="es-EC"/>
           </a:p>
@@ -960,7 +960,7 @@
           <a:p>
             <a:fld id="{D36E38E2-8CD1-214B-8036-CC600787765A}" type="datetimeFigureOut">
               <a:rPr lang="es-EC" smtClean="0"/>
-              <a:t>10/9/2026</a:t>
+              <a:t>21/9/2026</a:t>
             </a:fld>
             <a:endParaRPr lang="es-EC"/>
           </a:p>
@@ -1170,7 +1170,7 @@
           <a:p>
             <a:fld id="{D36E38E2-8CD1-214B-8036-CC600787765A}" type="datetimeFigureOut">
               <a:rPr lang="es-EC" smtClean="0"/>
-              <a:t>10/9/2026</a:t>
+              <a:t>21/9/2026</a:t>
             </a:fld>
             <a:endParaRPr lang="es-EC"/>
           </a:p>
@@ -1457,7 +1457,7 @@
           <a:p>
             <a:fld id="{D36E38E2-8CD1-214B-8036-CC600787765A}" type="datetimeFigureOut">
               <a:rPr lang="es-EC" smtClean="0"/>
-              <a:t>10/9/2026</a:t>
+              <a:t>21/9/2026</a:t>
             </a:fld>
             <a:endParaRPr lang="es-EC"/>
           </a:p>
@@ -1880,7 +1880,7 @@
           <a:p>
             <a:fld id="{D36E38E2-8CD1-214B-8036-CC600787765A}" type="datetimeFigureOut">
               <a:rPr lang="es-EC" smtClean="0"/>
-              <a:t>10/9/2026</a:t>
+              <a:t>21/9/2026</a:t>
             </a:fld>
             <a:endParaRPr lang="es-EC"/>
           </a:p>
@@ -2156,7 +2156,7 @@
           <a:p>
             <a:fld id="{D36E38E2-8CD1-214B-8036-CC600787765A}" type="datetimeFigureOut">
               <a:rPr lang="es-EC" smtClean="0"/>
-              <a:t>10/9/2026</a:t>
+              <a:t>21/9/2026</a:t>
             </a:fld>
             <a:endParaRPr lang="es-EC"/>
           </a:p>
@@ -2424,7 +2424,7 @@
           <a:p>
             <a:fld id="{D36E38E2-8CD1-214B-8036-CC600787765A}" type="datetimeFigureOut">
               <a:rPr lang="es-EC" smtClean="0"/>
-              <a:t>10/9/2026</a:t>
+              <a:t>21/9/2026</a:t>
             </a:fld>
             <a:endParaRPr lang="es-EC"/>
           </a:p>
@@ -2839,7 +2839,7 @@
           <a:p>
             <a:fld id="{D36E38E2-8CD1-214B-8036-CC600787765A}" type="datetimeFigureOut">
               <a:rPr lang="es-EC" smtClean="0"/>
-              <a:t>10/9/2026</a:t>
+              <a:t>21/9/2026</a:t>
             </a:fld>
             <a:endParaRPr lang="es-EC"/>
           </a:p>
@@ -3152,7 +3152,7 @@
           <a:p>
             <a:fld id="{D36E38E2-8CD1-214B-8036-CC600787765A}" type="datetimeFigureOut">
               <a:rPr lang="es-EC" smtClean="0"/>
-              <a:t>10/9/2026</a:t>
+              <a:t>21/9/2026</a:t>
             </a:fld>
             <a:endParaRPr lang="es-EC"/>
           </a:p>
@@ -3395,7 +3395,7 @@
           <a:p>
             <a:fld id="{D36E38E2-8CD1-214B-8036-CC600787765A}" type="datetimeFigureOut">
               <a:rPr lang="es-EC" smtClean="0"/>
-              <a:t>10/9/2026</a:t>
+              <a:t>21/9/2026</a:t>
             </a:fld>
             <a:endParaRPr lang="es-EC"/>
           </a:p>
@@ -4312,25 +4312,7 @@
                 </a:solidFill>
                 <a:latin typeface="Arial"/>
               </a:rPr>
-              <a:t>Flujo de </a:t>
-            </a:r>
-            <a:r>
-              <a:rPr lang="es-EC" sz="1400" dirty="0" err="1">
-                <a:solidFill>
-                  <a:srgbClr val="595959"/>
-                </a:solidFill>
-                <a:latin typeface="Arial"/>
-              </a:rPr>
-              <a:t>ransiciones</a:t>
-            </a:r>
-            <a:r>
-              <a:rPr lang="es-EC" sz="1400" dirty="0">
-                <a:solidFill>
-                  <a:srgbClr val="595959"/>
-                </a:solidFill>
-                <a:latin typeface="Arial"/>
-              </a:rPr>
-              <a:t> de estado de la plantilla (aprueba / rechaza / publica) y obtiene el historial de cambios de estado</a:t>
+              <a:t>Flujo de transiciones de estado de la plantilla (aprueba / rechaza / publica) y obtiene el historial de cambios de estado</a:t>
             </a:r>
             <a:endParaRPr lang="es-EC" sz="1400" b="0" dirty="0">
               <a:solidFill>
@@ -5149,7 +5131,7 @@
                 </a:solidFill>
                 <a:latin typeface="Arial"/>
               </a:rPr>
-              <a:t>onLoad: 'login-required' — redirige a login si no hay sesión</a:t>
+              <a:t>onLoad: 'login-required' — redirige a login</a:t>
             </a:r>
           </a:p>
           <a:p>
@@ -5242,8 +5224,68 @@
                 </a:solidFill>
                 <a:latin typeface="Arial"/>
               </a:rPr>
-              <a:t>quarkus.oidc.application-type=service</a:t>
-            </a:r>
+              <a:t>Configuración </a:t>
+            </a:r>
+            <a:r>
+              <a:rPr lang="es-EC" sz="1400" dirty="0">
+                <a:solidFill>
+                  <a:srgbClr val="595959"/>
+                </a:solidFill>
+                <a:latin typeface="Arial"/>
+              </a:rPr>
+              <a:t>en </a:t>
+            </a:r>
+            <a:r>
+              <a:rPr lang="es-EC" sz="1400" dirty="0" err="1">
+                <a:solidFill>
+                  <a:srgbClr val="595959"/>
+                </a:solidFill>
+                <a:latin typeface="Arial"/>
+              </a:rPr>
+              <a:t>application.properties</a:t>
+            </a:r>
+            <a:r>
+              <a:rPr lang="es-EC" sz="1400" dirty="0">
+                <a:solidFill>
+                  <a:srgbClr val="595959"/>
+                </a:solidFill>
+                <a:latin typeface="Arial"/>
+              </a:rPr>
+              <a:t> con </a:t>
+            </a:r>
+            <a:r>
+              <a:rPr lang="es-EC" sz="1400" b="0" dirty="0" err="1">
+                <a:solidFill>
+                  <a:srgbClr val="595959"/>
+                </a:solidFill>
+                <a:latin typeface="Arial"/>
+              </a:rPr>
+              <a:t>quarkus.oidc.application-type</a:t>
+            </a:r>
+            <a:r>
+              <a:rPr lang="es-EC" sz="1400" b="0" dirty="0">
+                <a:solidFill>
+                  <a:srgbClr val="595959"/>
+                </a:solidFill>
+                <a:latin typeface="Arial"/>
+              </a:rPr>
+              <a:t>=</a:t>
+            </a:r>
+            <a:r>
+              <a:rPr lang="es-EC" sz="1400" b="0" dirty="0" err="1">
+                <a:solidFill>
+                  <a:srgbClr val="595959"/>
+                </a:solidFill>
+                <a:latin typeface="Arial"/>
+              </a:rPr>
+              <a:t>service</a:t>
+            </a:r>
+            <a:endParaRPr lang="es-EC" sz="1400" b="0" dirty="0">
+              <a:solidFill>
+                <a:srgbClr val="595959"/>
+              </a:solidFill>
+              <a:latin typeface="Arial"/>
+            </a:endParaRPr>
           </a:p>
           <a:p>
             <a:pPr marL="514350" indent="-228600">
@@ -5257,8 +5299,23 @@
                 </a:solidFill>
                 <a:latin typeface="Arial"/>
               </a:rPr>
-              <a:t>Client-id y secret propios por servicio</a:t>
-            </a:r>
+              <a:t>Configuración de variables de entorno para Client-id y </a:t>
+            </a:r>
+            <a:r>
+              <a:rPr lang="es-EC" sz="1400" b="0" dirty="0" err="1">
+                <a:solidFill>
+                  <a:srgbClr val="595959"/>
+                </a:solidFill>
+                <a:latin typeface="Arial"/>
+              </a:rPr>
+              <a:t>secret</a:t>
+            </a:r>
+            <a:endParaRPr lang="es-EC" sz="1400" b="0" dirty="0">
+              <a:solidFill>
+                <a:srgbClr val="595959"/>
+              </a:solidFill>
+              <a:latin typeface="Arial"/>
+            </a:endParaRPr>
           </a:p>
           <a:p>
             <a:pPr marL="514350" indent="-228600">
@@ -5507,38 +5564,6 @@
           </a:p>
         </p:txBody>
       </p:sp>
-      <p:sp>
-        <p:nvSpPr>
-          <p:cNvPr id="21" name="Cierre subtitulo"/>
-          <p:cNvSpPr txBox="1"/>
-          <p:nvPr/>
-        </p:nvSpPr>
-        <p:spPr>
-          <a:xfrm>
-            <a:off x="1010400" y="2187544"/>
-            <a:ext cx="9600000" cy="700000"/>
-          </a:xfrm>
-          <a:prstGeom prst="rect">
-            <a:avLst/>
-          </a:prstGeom>
-          <a:noFill/>
-        </p:spPr>
-        <p:txBody>
-          <a:bodyPr wrap="square" rtlCol="0"/>
-          <a:lstStyle/>
-          <a:p>
-            <a:r>
-              <a:rPr lang="es-EC" sz="1400" dirty="0">
-                <a:solidFill>
-                  <a:srgbClr val="404040"/>
-                </a:solidFill>
-                <a:latin typeface="Arial"/>
-              </a:rPr>
-              <a:t>Documento completo con el detalle de cada punto: GAN-Transferencia-Conocimiento.docx</a:t>
-            </a:r>
-          </a:p>
-        </p:txBody>
-      </p:sp>
     </p:spTree>
     <p:extLst>
       <p:ext uri="{BB962C8B-B14F-4D97-AF65-F5344CB8AC3E}">
@@ -7033,13 +7058,22 @@
               <a:buChar char="•"/>
             </a:pPr>
             <a:r>
+              <a:rPr lang="es-EC" sz="1600" dirty="0" err="1">
+                <a:solidFill>
+                  <a:srgbClr val="202020"/>
+                </a:solidFill>
+                <a:latin typeface="Arial"/>
+              </a:rPr>
+              <a:t>Frontend</a:t>
+            </a:r>
+            <a:r>
               <a:rPr lang="es-EC" sz="1600" dirty="0">
                 <a:solidFill>
                   <a:srgbClr val="202020"/>
                 </a:solidFill>
                 <a:latin typeface="Arial"/>
               </a:rPr>
-              <a:t>Frontend (Vue 3 SPA) </a:t>
+              <a:t> </a:t>
             </a:r>
             <a:r>
               <a:rPr lang="es-EC" sz="1400" dirty="0">

--- a/Diseniador/GAN-Transferencia-Conocimiento.pptx
+++ b/Diseniador/GAN-Transferencia-Conocimiento.pptx
@@ -209,7 +209,7 @@
           <a:p>
             <a:fld id="{A903F93E-7217-AE40-A4DD-98A7EF3C3F2A}" type="datetimeFigureOut">
               <a:rPr lang="es-EC" smtClean="0"/>
-              <a:t>21/9/2026</a:t>
+              <a:t>23/9/2026</a:t>
             </a:fld>
             <a:endParaRPr lang="es-EC"/>
           </a:p>
@@ -960,7 +960,7 @@
           <a:p>
             <a:fld id="{D36E38E2-8CD1-214B-8036-CC600787765A}" type="datetimeFigureOut">
               <a:rPr lang="es-EC" smtClean="0"/>
-              <a:t>21/9/2026</a:t>
+              <a:t>23/9/2026</a:t>
             </a:fld>
             <a:endParaRPr lang="es-EC"/>
           </a:p>
@@ -1170,7 +1170,7 @@
           <a:p>
             <a:fld id="{D36E38E2-8CD1-214B-8036-CC600787765A}" type="datetimeFigureOut">
               <a:rPr lang="es-EC" smtClean="0"/>
-              <a:t>21/9/2026</a:t>
+              <a:t>23/9/2026</a:t>
             </a:fld>
             <a:endParaRPr lang="es-EC"/>
           </a:p>
@@ -1457,7 +1457,7 @@
           <a:p>
             <a:fld id="{D36E38E2-8CD1-214B-8036-CC600787765A}" type="datetimeFigureOut">
               <a:rPr lang="es-EC" smtClean="0"/>
-              <a:t>21/9/2026</a:t>
+              <a:t>23/9/2026</a:t>
             </a:fld>
             <a:endParaRPr lang="es-EC"/>
           </a:p>
@@ -1880,7 +1880,7 @@
           <a:p>
             <a:fld id="{D36E38E2-8CD1-214B-8036-CC600787765A}" type="datetimeFigureOut">
               <a:rPr lang="es-EC" smtClean="0"/>
-              <a:t>21/9/2026</a:t>
+              <a:t>23/9/2026</a:t>
             </a:fld>
             <a:endParaRPr lang="es-EC"/>
           </a:p>
@@ -2156,7 +2156,7 @@
           <a:p>
             <a:fld id="{D36E38E2-8CD1-214B-8036-CC600787765A}" type="datetimeFigureOut">
               <a:rPr lang="es-EC" smtClean="0"/>
-              <a:t>21/9/2026</a:t>
+              <a:t>23/9/2026</a:t>
             </a:fld>
             <a:endParaRPr lang="es-EC"/>
           </a:p>
@@ -2424,7 +2424,7 @@
           <a:p>
             <a:fld id="{D36E38E2-8CD1-214B-8036-CC600787765A}" type="datetimeFigureOut">
               <a:rPr lang="es-EC" smtClean="0"/>
-              <a:t>21/9/2026</a:t>
+              <a:t>23/9/2026</a:t>
             </a:fld>
             <a:endParaRPr lang="es-EC"/>
           </a:p>
@@ -2839,7 +2839,7 @@
           <a:p>
             <a:fld id="{D36E38E2-8CD1-214B-8036-CC600787765A}" type="datetimeFigureOut">
               <a:rPr lang="es-EC" smtClean="0"/>
-              <a:t>21/9/2026</a:t>
+              <a:t>23/9/2026</a:t>
             </a:fld>
             <a:endParaRPr lang="es-EC"/>
           </a:p>
@@ -3152,7 +3152,7 @@
           <a:p>
             <a:fld id="{D36E38E2-8CD1-214B-8036-CC600787765A}" type="datetimeFigureOut">
               <a:rPr lang="es-EC" smtClean="0"/>
-              <a:t>21/9/2026</a:t>
+              <a:t>23/9/2026</a:t>
             </a:fld>
             <a:endParaRPr lang="es-EC"/>
           </a:p>
@@ -3395,7 +3395,7 @@
           <a:p>
             <a:fld id="{D36E38E2-8CD1-214B-8036-CC600787765A}" type="datetimeFigureOut">
               <a:rPr lang="es-EC" smtClean="0"/>
-              <a:t>21/9/2026</a:t>
+              <a:t>23/9/2026</a:t>
             </a:fld>
             <a:endParaRPr lang="es-EC"/>
           </a:p>
@@ -3892,7 +3892,7 @@
                 </a:solidFill>
                 <a:latin typeface="Arial"/>
               </a:rPr>
-              <a:t>Transferencia de Conocimiento - Frontend, </a:t>
+              <a:t>Capacitación para la Transferencia de Conocimiento - Frontend, </a:t>
             </a:r>
             <a:r>
               <a:rPr lang="es-EC" sz="1600" dirty="0" err="1">
